--- a/bright-16-story-testimonial.pptx
+++ b/bright-16-story-testimonial.pptx
@@ -3088,20 +3088,12 @@
         <p:nvPr/>
       </p:nvGrpSpPr>
       <p:grpSpPr/>
-      <p:pic>
-        <p:nvPicPr>
-          <p:cNvPr id="2" name="Picture 1" descr="bright-16-story-testimonial.png"/>
-          <p:cNvPicPr>
-            <a:picLocks noChangeAspect="1"/>
-          </p:cNvPicPr>
+      <p:sp>
+        <p:nvSpPr>
+          <p:cNvPr id="2" name="Rectangle 1"/>
+          <p:cNvSpPr/>
           <p:nvPr/>
-        </p:nvPicPr>
-        <p:blipFill>
-          <a:blip r:embed="rId2"/>
-          <a:stretch>
-            <a:fillRect/>
-          </a:stretch>
-        </p:blipFill>
+        </p:nvSpPr>
         <p:spPr>
           <a:xfrm>
             <a:off x="0" y="0"/>
@@ -3110,8 +3102,631 @@
           <a:prstGeom prst="rect">
             <a:avLst/>
           </a:prstGeom>
+          <a:solidFill>
+            <a:srgbClr val="EDE7DD"/>
+          </a:solidFill>
+          <a:ln>
+            <a:noFill/>
+          </a:ln>
+          <a:effectLst/>
         </p:spPr>
-      </p:pic>
+        <p:style>
+          <a:lnRef idx="1">
+            <a:schemeClr val="accent1"/>
+          </a:lnRef>
+          <a:fillRef idx="3">
+            <a:schemeClr val="accent1"/>
+          </a:fillRef>
+          <a:effectRef idx="2">
+            <a:schemeClr val="accent1"/>
+          </a:effectRef>
+          <a:fontRef idx="minor">
+            <a:schemeClr val="lt1"/>
+          </a:fontRef>
+        </p:style>
+        <p:txBody>
+          <a:bodyPr rtlCol="0" anchor="ctr"/>
+          <a:lstStyle/>
+          <a:p>
+            <a:pPr algn="ctr"/>
+          </a:p>
+        </p:txBody>
+      </p:sp>
+      <p:sp>
+        <p:nvSpPr>
+          <p:cNvPr id="3" name="Rectangle 2"/>
+          <p:cNvSpPr/>
+          <p:nvPr/>
+        </p:nvSpPr>
+        <p:spPr>
+          <a:xfrm>
+            <a:off x="857250" y="1504950"/>
+            <a:ext cx="8572500" cy="9525"/>
+          </a:xfrm>
+          <a:prstGeom prst="rect">
+            <a:avLst/>
+          </a:prstGeom>
+          <a:solidFill>
+            <a:srgbClr val="BEC5B0"/>
+          </a:solidFill>
+          <a:ln>
+            <a:noFill/>
+          </a:ln>
+          <a:effectLst/>
+        </p:spPr>
+        <p:style>
+          <a:lnRef idx="1">
+            <a:schemeClr val="accent1"/>
+          </a:lnRef>
+          <a:fillRef idx="3">
+            <a:schemeClr val="accent1"/>
+          </a:fillRef>
+          <a:effectRef idx="2">
+            <a:schemeClr val="accent1"/>
+          </a:effectRef>
+          <a:fontRef idx="minor">
+            <a:schemeClr val="lt1"/>
+          </a:fontRef>
+        </p:style>
+        <p:txBody>
+          <a:bodyPr rtlCol="0" anchor="ctr"/>
+          <a:lstStyle/>
+          <a:p>
+            <a:pPr algn="ctr"/>
+          </a:p>
+        </p:txBody>
+      </p:sp>
+      <p:sp>
+        <p:nvSpPr>
+          <p:cNvPr id="4" name="Oval 3"/>
+          <p:cNvSpPr/>
+          <p:nvPr/>
+        </p:nvSpPr>
+        <p:spPr>
+          <a:xfrm>
+            <a:off x="857250" y="866775"/>
+            <a:ext cx="381000" cy="381000"/>
+          </a:xfrm>
+          <a:prstGeom prst="ellipse">
+            <a:avLst/>
+          </a:prstGeom>
+          <a:noFill/>
+          <a:ln w="9525">
+            <a:solidFill>
+              <a:srgbClr val="97A98C"/>
+            </a:solidFill>
+          </a:ln>
+          <a:effectLst/>
+        </p:spPr>
+        <p:style>
+          <a:lnRef idx="1">
+            <a:schemeClr val="accent1"/>
+          </a:lnRef>
+          <a:fillRef idx="3">
+            <a:schemeClr val="accent1"/>
+          </a:fillRef>
+          <a:effectRef idx="2">
+            <a:schemeClr val="accent1"/>
+          </a:effectRef>
+          <a:fontRef idx="minor">
+            <a:schemeClr val="lt1"/>
+          </a:fontRef>
+        </p:style>
+        <p:txBody>
+          <a:bodyPr rtlCol="0" anchor="ctr"/>
+          <a:lstStyle/>
+          <a:p>
+            <a:pPr algn="ctr"/>
+          </a:p>
+        </p:txBody>
+      </p:sp>
+      <p:sp>
+        <p:nvSpPr>
+          <p:cNvPr id="5" name="Rectangle 4"/>
+          <p:cNvSpPr/>
+          <p:nvPr/>
+        </p:nvSpPr>
+        <p:spPr>
+          <a:xfrm>
+            <a:off x="4003328" y="16535400"/>
+            <a:ext cx="2280345" cy="9525"/>
+          </a:xfrm>
+          <a:prstGeom prst="rect">
+            <a:avLst/>
+          </a:prstGeom>
+          <a:solidFill>
+            <a:srgbClr val="97A98C"/>
+          </a:solidFill>
+          <a:ln>
+            <a:noFill/>
+          </a:ln>
+          <a:effectLst/>
+        </p:spPr>
+        <p:style>
+          <a:lnRef idx="1">
+            <a:schemeClr val="accent1"/>
+          </a:lnRef>
+          <a:fillRef idx="3">
+            <a:schemeClr val="accent1"/>
+          </a:fillRef>
+          <a:effectRef idx="2">
+            <a:schemeClr val="accent1"/>
+          </a:effectRef>
+          <a:fontRef idx="minor">
+            <a:schemeClr val="lt1"/>
+          </a:fontRef>
+        </p:style>
+        <p:txBody>
+          <a:bodyPr rtlCol="0" anchor="ctr"/>
+          <a:lstStyle/>
+          <a:p>
+            <a:pPr algn="ctr"/>
+          </a:p>
+        </p:txBody>
+      </p:sp>
+      <p:sp>
+        <p:nvSpPr>
+          <p:cNvPr id="6" name="Rectangle 5"/>
+          <p:cNvSpPr/>
+          <p:nvPr/>
+        </p:nvSpPr>
+        <p:spPr>
+          <a:xfrm>
+            <a:off x="4003328" y="17021175"/>
+            <a:ext cx="2280345" cy="9525"/>
+          </a:xfrm>
+          <a:prstGeom prst="rect">
+            <a:avLst/>
+          </a:prstGeom>
+          <a:solidFill>
+            <a:srgbClr val="97A98C"/>
+          </a:solidFill>
+          <a:ln>
+            <a:noFill/>
+          </a:ln>
+          <a:effectLst/>
+        </p:spPr>
+        <p:style>
+          <a:lnRef idx="1">
+            <a:schemeClr val="accent1"/>
+          </a:lnRef>
+          <a:fillRef idx="3">
+            <a:schemeClr val="accent1"/>
+          </a:fillRef>
+          <a:effectRef idx="2">
+            <a:schemeClr val="accent1"/>
+          </a:effectRef>
+          <a:fontRef idx="minor">
+            <a:schemeClr val="lt1"/>
+          </a:fontRef>
+        </p:style>
+        <p:txBody>
+          <a:bodyPr rtlCol="0" anchor="ctr"/>
+          <a:lstStyle/>
+          <a:p>
+            <a:pPr algn="ctr"/>
+          </a:p>
+        </p:txBody>
+      </p:sp>
+      <p:sp>
+        <p:nvSpPr>
+          <p:cNvPr id="7" name="Rectangle 6"/>
+          <p:cNvSpPr/>
+          <p:nvPr/>
+        </p:nvSpPr>
+        <p:spPr>
+          <a:xfrm>
+            <a:off x="4003328" y="16535400"/>
+            <a:ext cx="9525" cy="495300"/>
+          </a:xfrm>
+          <a:prstGeom prst="rect">
+            <a:avLst/>
+          </a:prstGeom>
+          <a:solidFill>
+            <a:srgbClr val="97A98C"/>
+          </a:solidFill>
+          <a:ln>
+            <a:noFill/>
+          </a:ln>
+          <a:effectLst/>
+        </p:spPr>
+        <p:style>
+          <a:lnRef idx="1">
+            <a:schemeClr val="accent1"/>
+          </a:lnRef>
+          <a:fillRef idx="3">
+            <a:schemeClr val="accent1"/>
+          </a:fillRef>
+          <a:effectRef idx="2">
+            <a:schemeClr val="accent1"/>
+          </a:effectRef>
+          <a:fontRef idx="minor">
+            <a:schemeClr val="lt1"/>
+          </a:fontRef>
+        </p:style>
+        <p:txBody>
+          <a:bodyPr rtlCol="0" anchor="ctr"/>
+          <a:lstStyle/>
+          <a:p>
+            <a:pPr algn="ctr"/>
+          </a:p>
+        </p:txBody>
+      </p:sp>
+      <p:sp>
+        <p:nvSpPr>
+          <p:cNvPr id="8" name="Rectangle 7"/>
+          <p:cNvSpPr/>
+          <p:nvPr/>
+        </p:nvSpPr>
+        <p:spPr>
+          <a:xfrm>
+            <a:off x="6274147" y="16535400"/>
+            <a:ext cx="9525" cy="495300"/>
+          </a:xfrm>
+          <a:prstGeom prst="rect">
+            <a:avLst/>
+          </a:prstGeom>
+          <a:solidFill>
+            <a:srgbClr val="97A98C"/>
+          </a:solidFill>
+          <a:ln>
+            <a:noFill/>
+          </a:ln>
+          <a:effectLst/>
+        </p:spPr>
+        <p:style>
+          <a:lnRef idx="1">
+            <a:schemeClr val="accent1"/>
+          </a:lnRef>
+          <a:fillRef idx="3">
+            <a:schemeClr val="accent1"/>
+          </a:fillRef>
+          <a:effectRef idx="2">
+            <a:schemeClr val="accent1"/>
+          </a:effectRef>
+          <a:fontRef idx="minor">
+            <a:schemeClr val="lt1"/>
+          </a:fontRef>
+        </p:style>
+        <p:txBody>
+          <a:bodyPr rtlCol="0" anchor="ctr"/>
+          <a:lstStyle/>
+          <a:p>
+            <a:pPr algn="ctr"/>
+          </a:p>
+        </p:txBody>
+      </p:sp>
+      <p:sp>
+        <p:nvSpPr>
+          <p:cNvPr id="9" name="TextBox 8"/>
+          <p:cNvSpPr txBox="1"/>
+          <p:nvPr/>
+        </p:nvSpPr>
+        <p:spPr>
+          <a:xfrm>
+            <a:off x="919162" y="971550"/>
+            <a:ext cx="792480" cy="171450"/>
+          </a:xfrm>
+          <a:prstGeom prst="rect">
+            <a:avLst/>
+          </a:prstGeom>
+          <a:noFill/>
+        </p:spPr>
+        <p:txBody>
+          <a:bodyPr wrap="none" anchor="t" lIns="0" rIns="0" tIns="0" bIns="0"/>
+          <a:lstStyle/>
+          <a:p>
+            <a:pPr algn="l">
+              <a:lnSpc>
+                <a:spcPct val="100000"/>
+              </a:lnSpc>
+            </a:pPr>
+            <a:r>
+              <a:rPr sz="1350" i="0" b="0">
+                <a:solidFill>
+                  <a:srgbClr val="97A98C"/>
+                </a:solidFill>
+                <a:latin typeface="Cormorant Garamond"/>
+                <a:ea typeface="Cormorant Garamond"/>
+                <a:cs typeface="Cormorant Garamond"/>
+              </a:rPr>
+              <a:t>ME</a:t>
+            </a:r>
+          </a:p>
+        </p:txBody>
+      </p:sp>
+      <p:sp>
+        <p:nvSpPr>
+          <p:cNvPr id="10" name="TextBox 9"/>
+          <p:cNvSpPr txBox="1"/>
+          <p:nvPr/>
+        </p:nvSpPr>
+        <p:spPr>
+          <a:xfrm>
+            <a:off x="1390650" y="857250"/>
+            <a:ext cx="3282315" cy="228600"/>
+          </a:xfrm>
+          <a:prstGeom prst="rect">
+            <a:avLst/>
+          </a:prstGeom>
+          <a:noFill/>
+        </p:spPr>
+        <p:txBody>
+          <a:bodyPr wrap="none" anchor="t" lIns="0" rIns="0" tIns="0" bIns="0"/>
+          <a:lstStyle/>
+          <a:p>
+            <a:pPr algn="l">
+              <a:lnSpc>
+                <a:spcPct val="100000"/>
+              </a:lnSpc>
+            </a:pPr>
+            <a:r>
+              <a:rPr sz="1800" i="0" b="0">
+                <a:solidFill>
+                  <a:srgbClr val="33322E"/>
+                </a:solidFill>
+                <a:latin typeface="Cormorant Garamond"/>
+                <a:ea typeface="Cormorant Garamond"/>
+                <a:cs typeface="Cormorant Garamond"/>
+              </a:rPr>
+              <a:t>Maya Ellison</a:t>
+            </a:r>
+          </a:p>
+        </p:txBody>
+      </p:sp>
+      <p:sp>
+        <p:nvSpPr>
+          <p:cNvPr id="11" name="TextBox 10"/>
+          <p:cNvSpPr txBox="1"/>
+          <p:nvPr/>
+        </p:nvSpPr>
+        <p:spPr>
+          <a:xfrm>
+            <a:off x="1390650" y="1133475"/>
+            <a:ext cx="3282315" cy="123825"/>
+          </a:xfrm>
+          <a:prstGeom prst="rect">
+            <a:avLst/>
+          </a:prstGeom>
+          <a:noFill/>
+        </p:spPr>
+        <p:txBody>
+          <a:bodyPr wrap="none" anchor="t" lIns="0" rIns="0" tIns="0" bIns="0"/>
+          <a:lstStyle/>
+          <a:p>
+            <a:pPr algn="l"/>
+            <a:r>
+              <a:rPr sz="637" i="0" b="0" spc="216">
+                <a:solidFill>
+                  <a:srgbClr val="8A867E"/>
+                </a:solidFill>
+                <a:latin typeface="Poppins"/>
+                <a:ea typeface="Poppins"/>
+                <a:cs typeface="Poppins"/>
+              </a:rPr>
+              <a:t>REALTOR®  |  MODERN LIVING</a:t>
+            </a:r>
+          </a:p>
+        </p:txBody>
+      </p:sp>
+      <p:sp>
+        <p:nvSpPr>
+          <p:cNvPr id="12" name="TextBox 11"/>
+          <p:cNvSpPr txBox="1"/>
+          <p:nvPr/>
+        </p:nvSpPr>
+        <p:spPr>
+          <a:xfrm>
+            <a:off x="-1905000" y="5334000"/>
+            <a:ext cx="14097000" cy="428625"/>
+          </a:xfrm>
+          <a:prstGeom prst="rect">
+            <a:avLst/>
+          </a:prstGeom>
+          <a:noFill/>
+        </p:spPr>
+        <p:txBody>
+          <a:bodyPr wrap="none" anchor="t" lIns="0" rIns="0" tIns="0" bIns="0"/>
+          <a:lstStyle/>
+          <a:p>
+            <a:pPr algn="ctr">
+              <a:lnSpc>
+                <a:spcPct val="50000"/>
+              </a:lnSpc>
+            </a:pPr>
+            <a:r>
+              <a:rPr sz="6750" i="0" b="0">
+                <a:solidFill>
+                  <a:srgbClr val="97A98C"/>
+                </a:solidFill>
+                <a:latin typeface="Cormorant Garamond"/>
+                <a:ea typeface="Cormorant Garamond"/>
+                <a:cs typeface="Cormorant Garamond"/>
+              </a:rPr>
+              <a:t>“</a:t>
+            </a:r>
+          </a:p>
+        </p:txBody>
+      </p:sp>
+      <p:sp>
+        <p:nvSpPr>
+          <p:cNvPr id="13" name="TextBox 12"/>
+          <p:cNvSpPr txBox="1"/>
+          <p:nvPr/>
+        </p:nvSpPr>
+        <p:spPr>
+          <a:xfrm>
+            <a:off x="1238250" y="5991225"/>
+            <a:ext cx="7810500" cy="1458218"/>
+          </a:xfrm>
+          <a:prstGeom prst="rect">
+            <a:avLst/>
+          </a:prstGeom>
+          <a:noFill/>
+        </p:spPr>
+        <p:txBody>
+          <a:bodyPr wrap="square" anchor="t" lIns="0" rIns="0" tIns="0" bIns="0"/>
+          <a:lstStyle/>
+          <a:p>
+            <a:pPr algn="ctr">
+              <a:lnSpc>
+                <a:spcPct val="132000"/>
+              </a:lnSpc>
+            </a:pPr>
+            <a:r>
+              <a:rPr sz="4350" i="1" b="0">
+                <a:solidFill>
+                  <a:srgbClr val="33322E"/>
+                </a:solidFill>
+                <a:latin typeface="Cormorant Garamond"/>
+                <a:ea typeface="Cormorant Garamond"/>
+                <a:cs typeface="Cormorant Garamond"/>
+              </a:rPr>
+              <a:t>Maya made selling feel calm and clear from day one.</a:t>
+            </a:r>
+          </a:p>
+        </p:txBody>
+      </p:sp>
+      <p:sp>
+        <p:nvSpPr>
+          <p:cNvPr id="14" name="TextBox 13"/>
+          <p:cNvSpPr txBox="1"/>
+          <p:nvPr/>
+        </p:nvSpPr>
+        <p:spPr>
+          <a:xfrm>
+            <a:off x="-1905000" y="7868543"/>
+            <a:ext cx="14097000" cy="304800"/>
+          </a:xfrm>
+          <a:prstGeom prst="rect">
+            <a:avLst/>
+          </a:prstGeom>
+          <a:noFill/>
+        </p:spPr>
+        <p:txBody>
+          <a:bodyPr wrap="none" anchor="t" lIns="0" rIns="0" tIns="0" bIns="0"/>
+          <a:lstStyle/>
+          <a:p>
+            <a:pPr algn="ctr"/>
+            <a:r>
+              <a:rPr sz="1950" i="0" b="0" spc="600">
+                <a:solidFill>
+                  <a:srgbClr val="97A98C"/>
+                </a:solidFill>
+                <a:latin typeface="Lato"/>
+                <a:ea typeface="Lato"/>
+                <a:cs typeface="Lato"/>
+              </a:rPr>
+              <a:t>★★★★★</a:t>
+            </a:r>
+          </a:p>
+        </p:txBody>
+      </p:sp>
+      <p:sp>
+        <p:nvSpPr>
+          <p:cNvPr id="15" name="TextBox 14"/>
+          <p:cNvSpPr txBox="1"/>
+          <p:nvPr/>
+        </p:nvSpPr>
+        <p:spPr>
+          <a:xfrm>
+            <a:off x="-1905000" y="8440043"/>
+            <a:ext cx="14097000" cy="190500"/>
+          </a:xfrm>
+          <a:prstGeom prst="rect">
+            <a:avLst/>
+          </a:prstGeom>
+          <a:noFill/>
+        </p:spPr>
+        <p:txBody>
+          <a:bodyPr wrap="none" anchor="t" lIns="0" rIns="0" tIns="0" bIns="0"/>
+          <a:lstStyle/>
+          <a:p>
+            <a:pPr algn="ctr"/>
+            <a:r>
+              <a:rPr sz="975" i="0" b="0" spc="292">
+                <a:solidFill>
+                  <a:srgbClr val="8A867E"/>
+                </a:solidFill>
+                <a:latin typeface="Poppins"/>
+                <a:ea typeface="Poppins"/>
+                <a:cs typeface="Poppins"/>
+              </a:rPr>
+              <a:t>JENNA &amp; COLE R.</a:t>
+            </a:r>
+          </a:p>
+        </p:txBody>
+      </p:sp>
+      <p:sp>
+        <p:nvSpPr>
+          <p:cNvPr id="16" name="TextBox 15"/>
+          <p:cNvSpPr txBox="1"/>
+          <p:nvPr/>
+        </p:nvSpPr>
+        <p:spPr>
+          <a:xfrm>
+            <a:off x="4003328" y="16535400"/>
+            <a:ext cx="2280345" cy="495300"/>
+          </a:xfrm>
+          <a:prstGeom prst="rect">
+            <a:avLst/>
+          </a:prstGeom>
+          <a:noFill/>
+        </p:spPr>
+        <p:txBody>
+          <a:bodyPr wrap="square" anchor="t" lIns="0" rIns="0" tIns="0" bIns="0"/>
+          <a:lstStyle/>
+          <a:p>
+            <a:pPr algn="ctr"/>
+            <a:r>
+              <a:rPr sz="900" i="0" b="0" spc="270">
+                <a:solidFill>
+                  <a:srgbClr val="97A98C"/>
+                </a:solidFill>
+                <a:latin typeface="Poppins"/>
+                <a:ea typeface="Poppins"/>
+                <a:cs typeface="Poppins"/>
+              </a:rPr>
+              <a:t>YOUR TURN NEXT?</a:t>
+            </a:r>
+          </a:p>
+        </p:txBody>
+      </p:sp>
+      <p:sp>
+        <p:nvSpPr>
+          <p:cNvPr id="17" name="TextBox 16"/>
+          <p:cNvSpPr txBox="1"/>
+          <p:nvPr/>
+        </p:nvSpPr>
+        <p:spPr>
+          <a:xfrm>
+            <a:off x="-1905000" y="17278350"/>
+            <a:ext cx="14097000" cy="152400"/>
+          </a:xfrm>
+          <a:prstGeom prst="rect">
+            <a:avLst/>
+          </a:prstGeom>
+          <a:noFill/>
+        </p:spPr>
+        <p:txBody>
+          <a:bodyPr wrap="none" anchor="t" lIns="0" rIns="0" tIns="0" bIns="0"/>
+          <a:lstStyle/>
+          <a:p>
+            <a:pPr algn="ctr"/>
+            <a:r>
+              <a:rPr sz="750" i="0" b="0" spc="210">
+                <a:solidFill>
+                  <a:srgbClr val="8A867E"/>
+                </a:solidFill>
+                <a:latin typeface="Poppins"/>
+                <a:ea typeface="Poppins"/>
+                <a:cs typeface="Poppins"/>
+              </a:rPr>
+              <a:t>@MAYAELLISON · MAYAELLISON.COM</a:t>
+            </a:r>
+          </a:p>
+        </p:txBody>
+      </p:sp>
     </p:spTree>
   </p:cSld>
   <p:clrMapOvr>

--- a/bright-16-story-testimonial.pptx
+++ b/bright-16-story-testimonial.pptx
@@ -3140,7 +3140,7 @@
         </p:nvSpPr>
         <p:spPr>
           <a:xfrm>
-            <a:off x="857250" y="1504950"/>
+            <a:off x="857250" y="1724025"/>
             <a:ext cx="8572500" cy="9525"/>
           </a:xfrm>
           <a:prstGeom prst="rect">
@@ -3184,7 +3184,7 @@
         </p:nvSpPr>
         <p:spPr>
           <a:xfrm>
-            <a:off x="857250" y="866775"/>
+            <a:off x="857250" y="976312"/>
             <a:ext cx="381000" cy="381000"/>
           </a:xfrm>
           <a:prstGeom prst="ellipse">
@@ -3228,8 +3228,8 @@
         </p:nvSpPr>
         <p:spPr>
           <a:xfrm>
-            <a:off x="3503563" y="16221075"/>
-            <a:ext cx="3279725" cy="9525"/>
+            <a:off x="3125391" y="16011525"/>
+            <a:ext cx="4036070" cy="9525"/>
           </a:xfrm>
           <a:prstGeom prst="rect">
             <a:avLst/>
@@ -3272,8 +3272,8 @@
         </p:nvSpPr>
         <p:spPr>
           <a:xfrm>
-            <a:off x="3503563" y="16935450"/>
-            <a:ext cx="3279725" cy="9525"/>
+            <a:off x="3125391" y="16859250"/>
+            <a:ext cx="4036070" cy="9525"/>
           </a:xfrm>
           <a:prstGeom prst="rect">
             <a:avLst/>
@@ -3316,8 +3316,8 @@
         </p:nvSpPr>
         <p:spPr>
           <a:xfrm>
-            <a:off x="3503563" y="16221075"/>
-            <a:ext cx="9525" cy="723900"/>
+            <a:off x="3125391" y="16011525"/>
+            <a:ext cx="9525" cy="857250"/>
           </a:xfrm>
           <a:prstGeom prst="rect">
             <a:avLst/>
@@ -3360,8 +3360,8 @@
         </p:nvSpPr>
         <p:spPr>
           <a:xfrm>
-            <a:off x="6773763" y="16221075"/>
-            <a:ext cx="9525" cy="723900"/>
+            <a:off x="7151936" y="16011525"/>
+            <a:ext cx="9525" cy="857250"/>
           </a:xfrm>
           <a:prstGeom prst="rect">
             <a:avLst/>
@@ -3404,8 +3404,8 @@
         </p:nvSpPr>
         <p:spPr>
           <a:xfrm>
-            <a:off x="919162" y="971550"/>
-            <a:ext cx="792480" cy="171450"/>
+            <a:off x="912019" y="1076325"/>
+            <a:ext cx="815340" cy="180975"/>
           </a:xfrm>
           <a:prstGeom prst="rect">
             <a:avLst/>
@@ -3422,7 +3422,7 @@
               </a:lnSpc>
             </a:pPr>
             <a:r>
-              <a:rPr sz="1350" i="0" b="0">
+              <a:rPr sz="1425" i="0" b="0">
                 <a:solidFill>
                   <a:srgbClr val="97A98C"/>
                 </a:solidFill>
@@ -3444,7 +3444,7 @@
         <p:spPr>
           <a:xfrm>
             <a:off x="1390650" y="857250"/>
-            <a:ext cx="3282315" cy="228600"/>
+            <a:ext cx="5962650" cy="266700"/>
           </a:xfrm>
           <a:prstGeom prst="rect">
             <a:avLst/>
@@ -3461,7 +3461,7 @@
               </a:lnSpc>
             </a:pPr>
             <a:r>
-              <a:rPr sz="1800" i="0" b="0">
+              <a:rPr sz="2100" i="0" b="0">
                 <a:solidFill>
                   <a:srgbClr val="33322E"/>
                 </a:solidFill>
@@ -3482,8 +3482,8 @@
         </p:nvSpPr>
         <p:spPr>
           <a:xfrm>
-            <a:off x="1390650" y="1133475"/>
-            <a:ext cx="3282315" cy="123825"/>
+            <a:off x="1390650" y="1200150"/>
+            <a:ext cx="5962650" cy="276225"/>
           </a:xfrm>
           <a:prstGeom prst="rect">
             <a:avLst/>
@@ -3496,7 +3496,7 @@
           <a:p>
             <a:pPr algn="l"/>
             <a:r>
-              <a:rPr sz="637" i="0" b="0" spc="216">
+              <a:rPr sz="1425" i="0" b="0" spc="313">
                 <a:solidFill>
                   <a:srgbClr val="8A867E"/>
                 </a:solidFill>
@@ -3630,8 +3630,8 @@
         </p:nvSpPr>
         <p:spPr>
           <a:xfrm>
-            <a:off x="-1905000" y="8478143"/>
-            <a:ext cx="14097000" cy="257175"/>
+            <a:off x="-1905000" y="8497193"/>
+            <a:ext cx="14097000" cy="276225"/>
           </a:xfrm>
           <a:prstGeom prst="rect">
             <a:avLst/>
@@ -3644,7 +3644,7 @@
           <a:p>
             <a:pPr algn="ctr"/>
             <a:r>
-              <a:rPr sz="1350" i="0" b="0" spc="351">
+              <a:rPr sz="1425" i="0" b="0" spc="313">
                 <a:solidFill>
                   <a:srgbClr val="8A867E"/>
                 </a:solidFill>
@@ -3665,8 +3665,8 @@
         </p:nvSpPr>
         <p:spPr>
           <a:xfrm>
-            <a:off x="3503563" y="16221075"/>
-            <a:ext cx="3279725" cy="723900"/>
+            <a:off x="3125391" y="16011525"/>
+            <a:ext cx="4036070" cy="857250"/>
           </a:xfrm>
           <a:prstGeom prst="rect">
             <a:avLst/>
@@ -3679,7 +3679,7 @@
           <a:p>
             <a:pPr algn="ctr"/>
             <a:r>
-              <a:rPr sz="1500" i="0" b="0" spc="390">
+              <a:rPr sz="2025" i="0" b="0" spc="445">
                 <a:solidFill>
                   <a:srgbClr val="97A98C"/>
                 </a:solidFill>
@@ -3700,8 +3700,8 @@
         </p:nvSpPr>
         <p:spPr>
           <a:xfrm>
-            <a:off x="-1905000" y="17211675"/>
-            <a:ext cx="14097000" cy="219075"/>
+            <a:off x="-1905000" y="17154525"/>
+            <a:ext cx="14097000" cy="276225"/>
           </a:xfrm>
           <a:prstGeom prst="rect">
             <a:avLst/>
@@ -3714,7 +3714,7 @@
           <a:p>
             <a:pPr algn="ctr"/>
             <a:r>
-              <a:rPr sz="1125" i="0" b="0" spc="292">
+              <a:rPr sz="1425" i="0" b="0" spc="313">
                 <a:solidFill>
                   <a:srgbClr val="8A867E"/>
                 </a:solidFill>
